--- a/docs/hackathon/pitch-deck.pptx
+++ b/docs/hackathon/pitch-deck.pptx
@@ -7108,149 +7108,6 @@
       </p:sp>
       <p:sp>
         <p:nvSpPr>
-          <p:cNvPr id="22" name="Rectangle 21"/>
-          <p:cNvSpPr/>
-          <p:nvPr/>
-        </p:nvSpPr>
-        <p:spPr>
-          <a:xfrm>
-            <a:off x="9162288" y="2231136"/>
-            <a:ext cx="2084831" cy="2761488"/>
-          </a:xfrm>
-          <a:prstGeom prst="rect">
-            <a:avLst/>
-          </a:prstGeom>
-          <a:noFill/>
-          <a:ln w="12700">
-            <a:solidFill>
-              <a:srgbClr val="C9C1B2"/>
-            </a:solidFill>
-            <a:prstDash val="dash"/>
-          </a:ln>
-          <a:effectLst/>
-        </p:spPr>
-        <p:txBody>
-          <a:bodyPr rtlCol="0" anchor="ctr"/>
-          <a:lstStyle/>
-          <a:p>
-            <a:pPr algn="ctr"/>
-          </a:p>
-        </p:txBody>
-      </p:sp>
-      <p:sp>
-        <p:nvSpPr>
-          <p:cNvPr id="23" name="TextBox 22"/>
-          <p:cNvSpPr txBox="1"/>
-          <p:nvPr/>
-        </p:nvSpPr>
-        <p:spPr>
-          <a:xfrm>
-            <a:off x="9308592" y="3090672"/>
-            <a:ext cx="1792224" cy="731520"/>
-          </a:xfrm>
-          <a:prstGeom prst="rect">
-            <a:avLst/>
-          </a:prstGeom>
-          <a:noFill/>
-        </p:spPr>
-        <p:txBody>
-          <a:bodyPr wrap="square" lIns="0" rIns="0" tIns="0" bIns="0" anchor="t">
-            <a:spAutoFit/>
-          </a:bodyPr>
-          <a:lstStyle/>
-          <a:p>
-            <a:pPr algn="ctr">
-              <a:lnSpc>
-                <a:spcPct val="160000"/>
-              </a:lnSpc>
-            </a:pPr>
-            <a:r>
-              <a:rPr sz="950" b="0" i="0">
-                <a:solidFill>
-                  <a:srgbClr val="8A8577"/>
-                </a:solidFill>
-                <a:latin typeface="PingFang SC"/>
-                <a:ea typeface="PingFang SC"/>
-                <a:cs typeface="PingFang SC"/>
-              </a:rPr>
-              <a:t>手机伙伴页 / 真机画面</a:t>
-            </a:r>
-          </a:p>
-        </p:txBody>
-      </p:sp>
-      <p:sp>
-        <p:nvSpPr>
-          <p:cNvPr id="24" name="TextBox 23"/>
-          <p:cNvSpPr txBox="1"/>
-          <p:nvPr/>
-        </p:nvSpPr>
-        <p:spPr>
-          <a:xfrm>
-            <a:off x="9308592" y="3675887"/>
-            <a:ext cx="1792224" cy="365760"/>
-          </a:xfrm>
-          <a:prstGeom prst="rect">
-            <a:avLst/>
-          </a:prstGeom>
-          <a:noFill/>
-        </p:spPr>
-        <p:txBody>
-          <a:bodyPr wrap="square" lIns="0" rIns="0" tIns="0" bIns="0" anchor="t">
-            <a:spAutoFit/>
-          </a:bodyPr>
-          <a:lstStyle/>
-          <a:p>
-            <a:pPr algn="ctr">
-              <a:lnSpc>
-                <a:spcPct val="135000"/>
-              </a:lnSpc>
-            </a:pPr>
-            <a:r>
-              <a:rPr sz="900" b="0" i="0">
-                <a:solidFill>
-                  <a:srgbClr val="B4AC9C"/>
-                </a:solidFill>
-                <a:latin typeface="PingFang SC"/>
-                <a:ea typeface="PingFang SC"/>
-                <a:cs typeface="PingFang SC"/>
-              </a:rPr>
-              <a:t>（待补截图）</a:t>
-            </a:r>
-          </a:p>
-        </p:txBody>
-      </p:sp>
-      <p:sp>
-        <p:nvSpPr>
-          <p:cNvPr id="25" name="Rectangle 24"/>
-          <p:cNvSpPr/>
-          <p:nvPr/>
-        </p:nvSpPr>
-        <p:spPr>
-          <a:xfrm>
-            <a:off x="868680" y="5650992"/>
-            <a:ext cx="10454335" cy="7315"/>
-          </a:xfrm>
-          <a:prstGeom prst="rect">
-            <a:avLst/>
-          </a:prstGeom>
-          <a:solidFill>
-            <a:srgbClr val="D8D0C1"/>
-          </a:solidFill>
-          <a:ln>
-            <a:noFill/>
-          </a:ln>
-          <a:effectLst/>
-        </p:spPr>
-        <p:txBody>
-          <a:bodyPr rtlCol="0" anchor="ctr"/>
-          <a:lstStyle/>
-          <a:p>
-            <a:pPr algn="ctr"/>
-          </a:p>
-        </p:txBody>
-      </p:sp>
-      <p:sp>
-        <p:nvSpPr>
           <p:cNvPr id="26" name="TextBox 25"/>
           <p:cNvSpPr txBox="1"/>
           <p:nvPr/>
@@ -7327,6 +7184,69 @@
                 <a:cs typeface="PingFang SC"/>
               </a:rPr>
               <a:t>出处：docs/product/player-journey.md</a:t>
+            </a:r>
+          </a:p>
+        </p:txBody>
+      </p:sp>
+      <p:pic>
+        <p:nvPicPr>
+          <p:cNvPr id="28" name="手机 375x667 实测截图" descr="mobile-dock-375.jpg"/>
+          <p:cNvPicPr>
+            <a:picLocks noChangeAspect="1"/>
+          </p:cNvPicPr>
+          <p:nvPr/>
+        </p:nvPicPr>
+        <p:blipFill>
+          <a:blip r:embed="rId3"/>
+          <a:stretch>
+            <a:fillRect/>
+          </a:stretch>
+        </p:blipFill>
+        <p:spPr>
+          <a:xfrm>
+            <a:off x="9482328" y="2258568"/>
+            <a:ext cx="1383725" cy="2542032"/>
+          </a:xfrm>
+          <a:prstGeom prst="rect">
+            <a:avLst/>
+          </a:prstGeom>
+          <a:ln w="9525">
+            <a:solidFill>
+              <a:srgbClr val="8F9E90"/>
+            </a:solidFill>
+          </a:ln>
+        </p:spPr>
+      </p:pic>
+      <p:sp>
+        <p:nvSpPr>
+          <p:cNvPr id="29" name="TextBox 28"/>
+          <p:cNvSpPr txBox="1"/>
+          <p:nvPr/>
+        </p:nvSpPr>
+        <p:spPr>
+          <a:xfrm>
+            <a:off x="9162288" y="4855464"/>
+            <a:ext cx="2084831" cy="274320"/>
+          </a:xfrm>
+          <a:prstGeom prst="rect">
+            <a:avLst/>
+          </a:prstGeom>
+          <a:noFill/>
+        </p:spPr>
+        <p:txBody>
+          <a:bodyPr wrap="square">
+            <a:spAutoFit/>
+          </a:bodyPr>
+          <a:lstStyle/>
+          <a:p>
+            <a:pPr algn="ctr"/>
+            <a:r>
+              <a:rPr sz="800">
+                <a:solidFill>
+                  <a:srgbClr val="5F6B60"/>
+                </a:solidFill>
+              </a:rPr>
+              <a:t>375×667 实测：底栏与键盘入口常驻</a:t>
             </a:r>
           </a:p>
         </p:txBody>
